--- a/PPTs/L4-Exercises ANS.pptx
+++ b/PPTs/L4-Exercises ANS.pptx
@@ -181,6 +181,35 @@
 </p:presentation>
 </file>
 
+<file path=ppt/changesInfos/changesInfo1.xml><?xml version="1.0" encoding="utf-8"?>
+<pc:chgInfo xmlns:a="http://schemas.openxmlformats.org/drawingml/2006/main" xmlns:r="http://schemas.openxmlformats.org/officeDocument/2006/relationships" xmlns:ac="http://schemas.microsoft.com/office/drawing/2013/main/command" xmlns:pc="http://schemas.microsoft.com/office/powerpoint/2013/main/command">
+  <pc:docChgLst>
+    <pc:chgData name="Zonghua Gu" userId="9a7e1853e1951ef5" providerId="LiveId" clId="{CF1FAA12-072C-4ED5-BA76-0FFFAEFDB88A}"/>
+    <pc:docChg chg="modSld">
+      <pc:chgData name="Zonghua Gu" userId="9a7e1853e1951ef5" providerId="LiveId" clId="{CF1FAA12-072C-4ED5-BA76-0FFFAEFDB88A}" dt="2025-09-26T00:33:07.077" v="1" actId="20577"/>
+      <pc:docMkLst>
+        <pc:docMk/>
+      </pc:docMkLst>
+      <pc:sldChg chg="modSp mod">
+        <pc:chgData name="Zonghua Gu" userId="9a7e1853e1951ef5" providerId="LiveId" clId="{CF1FAA12-072C-4ED5-BA76-0FFFAEFDB88A}" dt="2025-09-26T00:33:07.077" v="1" actId="20577"/>
+        <pc:sldMkLst>
+          <pc:docMk/>
+          <pc:sldMk cId="3198402123" sldId="381"/>
+        </pc:sldMkLst>
+        <pc:spChg chg="mod">
+          <ac:chgData name="Zonghua Gu" userId="9a7e1853e1951ef5" providerId="LiveId" clId="{CF1FAA12-072C-4ED5-BA76-0FFFAEFDB88A}" dt="2025-09-26T00:33:07.077" v="1" actId="20577"/>
+          <ac:spMkLst>
+            <pc:docMk/>
+            <pc:sldMk cId="3198402123" sldId="381"/>
+            <ac:spMk id="22" creationId="{E6AF71B3-F5D1-B2DE-B835-5C8208F44553}"/>
+          </ac:spMkLst>
+        </pc:spChg>
+      </pc:sldChg>
+    </pc:docChg>
+  </pc:docChgLst>
+</pc:chgInfo>
+</file>
+
 <file path=ppt/handoutMasters/handoutMaster1.xml><?xml version="1.0" encoding="utf-8"?>
 <p:handoutMaster xmlns:a="http://schemas.openxmlformats.org/drawingml/2006/main" xmlns:r="http://schemas.openxmlformats.org/officeDocument/2006/relationships" xmlns:p="http://schemas.openxmlformats.org/presentationml/2006/main">
   <p:cSld>
@@ -229,14 +258,14 @@
           <a:effectLst/>
           <a:extLst>
             <a:ext uri="{909E8E84-426E-40dd-AFC4-6F175D3DCCD1}">
-              <a14:hiddenFill xmlns:a14="http://schemas.microsoft.com/office/drawing/2010/main" xmlns="">
+              <a14:hiddenFill xmlns="" xmlns:a14="http://schemas.microsoft.com/office/drawing/2010/main">
                 <a:solidFill>
                   <a:schemeClr val="bg1"/>
                 </a:solidFill>
               </a14:hiddenFill>
             </a:ext>
             <a:ext uri="{91240B29-F687-4f45-9708-019B960494DF}">
-              <a14:hiddenLine xmlns:a14="http://schemas.microsoft.com/office/drawing/2010/main" xmlns="" w="12700">
+              <a14:hiddenLine xmlns="" xmlns:a14="http://schemas.microsoft.com/office/drawing/2010/main" w="12700">
                 <a:pattFill prst="narHorz">
                   <a:fgClr>
                     <a:schemeClr val="tx1"/>
@@ -251,7 +280,7 @@
               </a14:hiddenLine>
             </a:ext>
             <a:ext uri="{AF507438-7753-43e0-B8FC-AC1667EBCBE1}">
-              <a14:hiddenEffects xmlns:a14="http://schemas.microsoft.com/office/drawing/2010/main" xmlns="">
+              <a14:hiddenEffects xmlns="" xmlns:a14="http://schemas.microsoft.com/office/drawing/2010/main">
                 <a:effectLst>
                   <a:outerShdw dist="35921" dir="2700000" algn="ctr" rotWithShape="0">
                     <a:schemeClr val="bg2"/>
@@ -357,14 +386,14 @@
           <a:effectLst/>
           <a:extLst>
             <a:ext uri="{909E8E84-426E-40dd-AFC4-6F175D3DCCD1}">
-              <a14:hiddenFill xmlns:a14="http://schemas.microsoft.com/office/drawing/2010/main" xmlns="">
+              <a14:hiddenFill xmlns="" xmlns:a14="http://schemas.microsoft.com/office/drawing/2010/main">
                 <a:solidFill>
                   <a:schemeClr val="bg1"/>
                 </a:solidFill>
               </a14:hiddenFill>
             </a:ext>
             <a:ext uri="{91240B29-F687-4f45-9708-019B960494DF}">
-              <a14:hiddenLine xmlns:a14="http://schemas.microsoft.com/office/drawing/2010/main" xmlns="" w="12700">
+              <a14:hiddenLine xmlns="" xmlns:a14="http://schemas.microsoft.com/office/drawing/2010/main" w="12700">
                 <a:pattFill prst="narHorz">
                   <a:fgClr>
                     <a:schemeClr val="tx1"/>
@@ -379,7 +408,7 @@
               </a14:hiddenLine>
             </a:ext>
             <a:ext uri="{AF507438-7753-43e0-B8FC-AC1667EBCBE1}">
-              <a14:hiddenEffects xmlns:a14="http://schemas.microsoft.com/office/drawing/2010/main" xmlns="">
+              <a14:hiddenEffects xmlns="" xmlns:a14="http://schemas.microsoft.com/office/drawing/2010/main">
                 <a:effectLst>
                   <a:outerShdw dist="35921" dir="2700000" algn="ctr" rotWithShape="0">
                     <a:schemeClr val="bg2"/>
@@ -447,17 +476,17 @@
           <a:effectLst/>
           <a:extLst>
             <a:ext uri="{FAA26D3D-D897-4be2-8F04-BA451C77F1D7}">
-              <ma14:placeholderFlag xmlns:ma14="http://schemas.microsoft.com/office/mac/drawingml/2011/main" xmlns="" val="1"/>
+              <ma14:placeholderFlag xmlns="" xmlns:ma14="http://schemas.microsoft.com/office/mac/drawingml/2011/main" val="1"/>
             </a:ext>
             <a:ext uri="{909E8E84-426E-40dd-AFC4-6F175D3DCCD1}">
-              <a14:hiddenFill xmlns:a14="http://schemas.microsoft.com/office/drawing/2010/main" xmlns="">
+              <a14:hiddenFill xmlns="" xmlns:a14="http://schemas.microsoft.com/office/drawing/2010/main">
                 <a:solidFill>
                   <a:srgbClr val="FFFFFF"/>
                 </a:solidFill>
               </a14:hiddenFill>
             </a:ext>
             <a:ext uri="{AF507438-7753-43e0-B8FC-AC1667EBCBE1}">
-              <a14:hiddenEffects xmlns:a14="http://schemas.microsoft.com/office/drawing/2010/main" xmlns="">
+              <a14:hiddenEffects xmlns="" xmlns:a14="http://schemas.microsoft.com/office/drawing/2010/main">
                 <a:effectLst>
                   <a:outerShdw blurRad="63500" dist="38099" dir="2700000" algn="ctr" rotWithShape="0">
                     <a:srgbClr val="000000">
@@ -468,7 +497,7 @@
               </a14:hiddenEffects>
             </a:ext>
             <a:ext uri="{53640926-AAD7-44d8-BBD7-CCE9431645EC}">
-              <a14:shadowObscured xmlns:a14="http://schemas.microsoft.com/office/drawing/2010/main" xmlns="" val="1"/>
+              <a14:shadowObscured xmlns="" xmlns:a14="http://schemas.microsoft.com/office/drawing/2010/main" val="1"/>
             </a:ext>
           </a:extLst>
         </p:spPr>
@@ -498,14 +527,14 @@
           <a:effectLst/>
           <a:extLst>
             <a:ext uri="{909E8E84-426E-40dd-AFC4-6F175D3DCCD1}">
-              <a14:hiddenFill xmlns:a14="http://schemas.microsoft.com/office/drawing/2010/main" xmlns="">
+              <a14:hiddenFill xmlns="" xmlns:a14="http://schemas.microsoft.com/office/drawing/2010/main">
                 <a:solidFill>
                   <a:schemeClr val="bg1"/>
                 </a:solidFill>
               </a14:hiddenFill>
             </a:ext>
             <a:ext uri="{91240B29-F687-4f45-9708-019B960494DF}">
-              <a14:hiddenLine xmlns:a14="http://schemas.microsoft.com/office/drawing/2010/main" xmlns="" w="12700">
+              <a14:hiddenLine xmlns="" xmlns:a14="http://schemas.microsoft.com/office/drawing/2010/main" w="12700">
                 <a:pattFill prst="narHorz">
                   <a:fgClr>
                     <a:schemeClr val="tx1"/>
@@ -520,7 +549,7 @@
               </a14:hiddenLine>
             </a:ext>
             <a:ext uri="{AF507438-7753-43e0-B8FC-AC1667EBCBE1}">
-              <a14:hiddenEffects xmlns:a14="http://schemas.microsoft.com/office/drawing/2010/main" xmlns="">
+              <a14:hiddenEffects xmlns="" xmlns:a14="http://schemas.microsoft.com/office/drawing/2010/main">
                 <a:effectLst>
                   <a:outerShdw dist="35921" dir="2700000" algn="ctr" rotWithShape="0">
                     <a:schemeClr val="bg2"/>
@@ -770,10 +799,10 @@
         <p:spPr>
           <a:extLst>
             <a:ext uri="{FAA26D3D-D897-4be2-8F04-BA451C77F1D7}">
-              <ma14:placeholderFlag xmlns:ma14="http://schemas.microsoft.com/office/mac/drawingml/2011/main" xmlns="" val="1"/>
+              <ma14:placeholderFlag xmlns="" xmlns:ma14="http://schemas.microsoft.com/office/mac/drawingml/2011/main" val="1"/>
             </a:ext>
             <a:ext uri="{AF507438-7753-43e0-B8FC-AC1667EBCBE1}">
-              <a14:hiddenEffects xmlns:a14="http://schemas.microsoft.com/office/drawing/2010/main" xmlns="">
+              <a14:hiddenEffects xmlns="" xmlns:a14="http://schemas.microsoft.com/office/drawing/2010/main">
                 <a:effectLst>
                   <a:outerShdw blurRad="63500" dist="38099" dir="2700000" algn="ctr" rotWithShape="0">
                     <a:schemeClr val="bg2">
@@ -3718,17 +3747,17 @@
           <a:effectLst/>
           <a:extLst>
             <a:ext uri="{FAA26D3D-D897-4be2-8F04-BA451C77F1D7}">
-              <ma14:placeholderFlag xmlns:ma14="http://schemas.microsoft.com/office/mac/drawingml/2011/main" xmlns="" val="1"/>
+              <ma14:placeholderFlag xmlns="" xmlns:ma14="http://schemas.microsoft.com/office/mac/drawingml/2011/main" val="1"/>
             </a:ext>
             <a:ext uri="{909E8E84-426E-40dd-AFC4-6F175D3DCCD1}">
-              <a14:hiddenFill xmlns:a14="http://schemas.microsoft.com/office/drawing/2010/main" xmlns="">
+              <a14:hiddenFill xmlns="" xmlns:a14="http://schemas.microsoft.com/office/drawing/2010/main">
                 <a:solidFill>
                   <a:schemeClr val="bg1"/>
                 </a:solidFill>
               </a14:hiddenFill>
             </a:ext>
             <a:ext uri="{91240B29-F687-4f45-9708-019B960494DF}">
-              <a14:hiddenLine xmlns:a14="http://schemas.microsoft.com/office/drawing/2010/main" xmlns="" w="12700">
+              <a14:hiddenLine xmlns="" xmlns:a14="http://schemas.microsoft.com/office/drawing/2010/main" w="12700">
                 <a:pattFill prst="narHorz">
                   <a:fgClr>
                     <a:schemeClr val="tx1"/>
@@ -3743,7 +3772,7 @@
               </a14:hiddenLine>
             </a:ext>
             <a:ext uri="{AF507438-7753-43e0-B8FC-AC1667EBCBE1}">
-              <a14:hiddenEffects xmlns:a14="http://schemas.microsoft.com/office/drawing/2010/main" xmlns="">
+              <a14:hiddenEffects xmlns="" xmlns:a14="http://schemas.microsoft.com/office/drawing/2010/main">
                 <a:effectLst>
                   <a:outerShdw blurRad="63500" dist="38099" dir="2700000" algn="ctr" rotWithShape="0">
                     <a:schemeClr val="bg2">
@@ -3796,17 +3825,17 @@
           <a:effectLst/>
           <a:extLst>
             <a:ext uri="{FAA26D3D-D897-4be2-8F04-BA451C77F1D7}">
-              <ma14:placeholderFlag xmlns:ma14="http://schemas.microsoft.com/office/mac/drawingml/2011/main" xmlns="" val="1"/>
+              <ma14:placeholderFlag xmlns="" xmlns:ma14="http://schemas.microsoft.com/office/mac/drawingml/2011/main" val="1"/>
             </a:ext>
             <a:ext uri="{909E8E84-426E-40dd-AFC4-6F175D3DCCD1}">
-              <a14:hiddenFill xmlns:a14="http://schemas.microsoft.com/office/drawing/2010/main" xmlns="">
+              <a14:hiddenFill xmlns="" xmlns:a14="http://schemas.microsoft.com/office/drawing/2010/main">
                 <a:solidFill>
                   <a:schemeClr val="bg1"/>
                 </a:solidFill>
               </a14:hiddenFill>
             </a:ext>
             <a:ext uri="{91240B29-F687-4f45-9708-019B960494DF}">
-              <a14:hiddenLine xmlns:a14="http://schemas.microsoft.com/office/drawing/2010/main" xmlns="" w="12700">
+              <a14:hiddenLine xmlns="" xmlns:a14="http://schemas.microsoft.com/office/drawing/2010/main" w="12700">
                 <a:pattFill prst="narHorz">
                   <a:fgClr>
                     <a:schemeClr val="tx1"/>
@@ -3821,7 +3850,7 @@
               </a14:hiddenLine>
             </a:ext>
             <a:ext uri="{AF507438-7753-43e0-B8FC-AC1667EBCBE1}">
-              <a14:hiddenEffects xmlns:a14="http://schemas.microsoft.com/office/drawing/2010/main" xmlns="">
+              <a14:hiddenEffects xmlns="" xmlns:a14="http://schemas.microsoft.com/office/drawing/2010/main">
                 <a:effectLst>
                   <a:outerShdw blurRad="63500" dist="38099" dir="2700000" algn="ctr" rotWithShape="0">
                     <a:schemeClr val="bg2">
@@ -3905,12 +3934,12 @@
           <a:effectLst/>
           <a:extLst>
             <a:ext uri="{909E8E84-426E-40dd-AFC4-6F175D3DCCD1}">
-              <a14:hiddenFill xmlns:a14="http://schemas.microsoft.com/office/drawing/2010/main" xmlns="">
+              <a14:hiddenFill xmlns="" xmlns:a14="http://schemas.microsoft.com/office/drawing/2010/main">
                 <a:noFill/>
               </a14:hiddenFill>
             </a:ext>
             <a:ext uri="{AF507438-7753-43e0-B8FC-AC1667EBCBE1}">
-              <a14:hiddenEffects xmlns:a14="http://schemas.microsoft.com/office/drawing/2010/main" xmlns="">
+              <a14:hiddenEffects xmlns="" xmlns:a14="http://schemas.microsoft.com/office/drawing/2010/main">
                 <a:effectLst>
                   <a:outerShdw blurRad="63500" dist="38099" dir="2700000" algn="ctr" rotWithShape="0">
                     <a:schemeClr val="bg2">
@@ -5405,10 +5434,10 @@
                   <p:embed/>
                   <p:pic>
                     <p:nvPicPr>
-                      <p:cNvPr id="23" name="Object 3">
+                      <p:cNvPr id="45" name="Object 3">
                         <a:extLst>
                           <a:ext uri="{FF2B5EF4-FFF2-40B4-BE49-F238E27FC236}">
-                            <a16:creationId xmlns:a16="http://schemas.microsoft.com/office/drawing/2014/main" id="{06E861FC-D68E-CD7A-71ED-F7EE3565A007}"/>
+                            <a16:creationId xmlns:a16="http://schemas.microsoft.com/office/drawing/2014/main" id="{CA0B226B-6F5F-5E38-0647-CFF2C788024B}"/>
                           </a:ext>
                         </a:extLst>
                       </p:cNvPr>
@@ -7969,7 +7998,7 @@
           <a:effectLst/>
           <a:extLst>
             <a:ext uri="{AF507438-7753-43e0-B8FC-AC1667EBCBE1}">
-              <a14:hiddenEffects xmlns="" xmlns:a14="http://schemas.microsoft.com/office/drawing/2010/main">
+              <a14:hiddenEffects xmlns:a14="http://schemas.microsoft.com/office/drawing/2010/main" xmlns="">
                 <a:effectLst>
                   <a:outerShdw dist="35921" dir="2700000" algn="ctr" rotWithShape="0">
                     <a:schemeClr val="bg2"/>
@@ -8275,7 +8304,7 @@
           <a:effectLst/>
           <a:extLst>
             <a:ext uri="{AF507438-7753-43e0-B8FC-AC1667EBCBE1}">
-              <a14:hiddenEffects xmlns="" xmlns:a14="http://schemas.microsoft.com/office/drawing/2010/main">
+              <a14:hiddenEffects xmlns:a14="http://schemas.microsoft.com/office/drawing/2010/main" xmlns="">
                 <a:effectLst>
                   <a:outerShdw dist="35921" dir="2700000" algn="ctr" rotWithShape="0">
                     <a:schemeClr val="bg2"/>
@@ -8610,17 +8639,17 @@
           <a:effectLst/>
           <a:extLst>
             <a:ext uri="{FAA26D3D-D897-4be2-8F04-BA451C77F1D7}">
-              <ma14:placeholderFlag xmlns:ma14="http://schemas.microsoft.com/office/mac/drawingml/2011/main" xmlns="" val="1"/>
+              <ma14:placeholderFlag xmlns="" xmlns:ma14="http://schemas.microsoft.com/office/mac/drawingml/2011/main" val="1"/>
             </a:ext>
             <a:ext uri="{909E8E84-426E-40dd-AFC4-6F175D3DCCD1}">
-              <a14:hiddenFill xmlns:a14="http://schemas.microsoft.com/office/drawing/2010/main" xmlns="">
+              <a14:hiddenFill xmlns="" xmlns:a14="http://schemas.microsoft.com/office/drawing/2010/main">
                 <a:solidFill>
                   <a:schemeClr val="bg1"/>
                 </a:solidFill>
               </a14:hiddenFill>
             </a:ext>
             <a:ext uri="{91240B29-F687-4f45-9708-019B960494DF}">
-              <a14:hiddenLine xmlns:a14="http://schemas.microsoft.com/office/drawing/2010/main" xmlns="" w="12700">
+              <a14:hiddenLine xmlns="" xmlns:a14="http://schemas.microsoft.com/office/drawing/2010/main" w="12700">
                 <a:pattFill prst="narHorz">
                   <a:fgClr>
                     <a:schemeClr val="tx1"/>
@@ -8635,7 +8664,7 @@
               </a14:hiddenLine>
             </a:ext>
             <a:ext uri="{AF507438-7753-43e0-B8FC-AC1667EBCBE1}">
-              <a14:hiddenEffects xmlns:a14="http://schemas.microsoft.com/office/drawing/2010/main" xmlns="">
+              <a14:hiddenEffects xmlns="" xmlns:a14="http://schemas.microsoft.com/office/drawing/2010/main">
                 <a:effectLst>
                   <a:outerShdw blurRad="63500" dist="38099" dir="2700000" algn="ctr" rotWithShape="0">
                     <a:schemeClr val="bg2">
@@ -10125,17 +10154,17 @@
           <a:effectLst/>
           <a:extLst>
             <a:ext uri="{FAA26D3D-D897-4be2-8F04-BA451C77F1D7}">
-              <ma14:placeholderFlag xmlns:ma14="http://schemas.microsoft.com/office/mac/drawingml/2011/main" xmlns="" val="1"/>
+              <ma14:placeholderFlag xmlns="" xmlns:ma14="http://schemas.microsoft.com/office/mac/drawingml/2011/main" val="1"/>
             </a:ext>
             <a:ext uri="{909E8E84-426E-40dd-AFC4-6F175D3DCCD1}">
-              <a14:hiddenFill xmlns:a14="http://schemas.microsoft.com/office/drawing/2010/main" xmlns="">
+              <a14:hiddenFill xmlns="" xmlns:a14="http://schemas.microsoft.com/office/drawing/2010/main">
                 <a:solidFill>
                   <a:schemeClr val="bg1"/>
                 </a:solidFill>
               </a14:hiddenFill>
             </a:ext>
             <a:ext uri="{91240B29-F687-4f45-9708-019B960494DF}">
-              <a14:hiddenLine xmlns:a14="http://schemas.microsoft.com/office/drawing/2010/main" xmlns="" w="12700">
+              <a14:hiddenLine xmlns="" xmlns:a14="http://schemas.microsoft.com/office/drawing/2010/main" w="12700">
                 <a:pattFill prst="narHorz">
                   <a:fgClr>
                     <a:schemeClr val="tx1"/>
@@ -10150,7 +10179,7 @@
               </a14:hiddenLine>
             </a:ext>
             <a:ext uri="{AF507438-7753-43e0-B8FC-AC1667EBCBE1}">
-              <a14:hiddenEffects xmlns:a14="http://schemas.microsoft.com/office/drawing/2010/main" xmlns="">
+              <a14:hiddenEffects xmlns="" xmlns:a14="http://schemas.microsoft.com/office/drawing/2010/main">
                 <a:effectLst>
                   <a:outerShdw blurRad="63500" dist="38099" dir="2700000" algn="ctr" rotWithShape="0">
                     <a:schemeClr val="bg2">
@@ -10944,17 +10973,17 @@
           <a:effectLst/>
           <a:extLst>
             <a:ext uri="{FAA26D3D-D897-4be2-8F04-BA451C77F1D7}">
-              <ma14:placeholderFlag xmlns:ma14="http://schemas.microsoft.com/office/mac/drawingml/2011/main" xmlns="" val="1"/>
+              <ma14:placeholderFlag xmlns="" xmlns:ma14="http://schemas.microsoft.com/office/mac/drawingml/2011/main" val="1"/>
             </a:ext>
             <a:ext uri="{909E8E84-426E-40dd-AFC4-6F175D3DCCD1}">
-              <a14:hiddenFill xmlns:a14="http://schemas.microsoft.com/office/drawing/2010/main" xmlns="">
+              <a14:hiddenFill xmlns="" xmlns:a14="http://schemas.microsoft.com/office/drawing/2010/main">
                 <a:solidFill>
                   <a:schemeClr val="bg1"/>
                 </a:solidFill>
               </a14:hiddenFill>
             </a:ext>
             <a:ext uri="{91240B29-F687-4f45-9708-019B960494DF}">
-              <a14:hiddenLine xmlns:a14="http://schemas.microsoft.com/office/drawing/2010/main" xmlns="" w="12700">
+              <a14:hiddenLine xmlns="" xmlns:a14="http://schemas.microsoft.com/office/drawing/2010/main" w="12700">
                 <a:pattFill prst="narHorz">
                   <a:fgClr>
                     <a:schemeClr val="tx1"/>
@@ -10969,7 +10998,7 @@
               </a14:hiddenLine>
             </a:ext>
             <a:ext uri="{AF507438-7753-43e0-B8FC-AC1667EBCBE1}">
-              <a14:hiddenEffects xmlns:a14="http://schemas.microsoft.com/office/drawing/2010/main" xmlns="">
+              <a14:hiddenEffects xmlns="" xmlns:a14="http://schemas.microsoft.com/office/drawing/2010/main">
                 <a:effectLst>
                   <a:outerShdw blurRad="63500" dist="38099" dir="2700000" algn="ctr" rotWithShape="0">
                     <a:schemeClr val="bg2">
@@ -11330,17 +11359,17 @@
           <a:effectLst/>
           <a:extLst>
             <a:ext uri="{FAA26D3D-D897-4be2-8F04-BA451C77F1D7}">
-              <ma14:placeholderFlag xmlns:ma14="http://schemas.microsoft.com/office/mac/drawingml/2011/main" xmlns="" val="1"/>
+              <ma14:placeholderFlag xmlns="" xmlns:ma14="http://schemas.microsoft.com/office/mac/drawingml/2011/main" val="1"/>
             </a:ext>
             <a:ext uri="{909E8E84-426E-40dd-AFC4-6F175D3DCCD1}">
-              <a14:hiddenFill xmlns:a14="http://schemas.microsoft.com/office/drawing/2010/main" xmlns="">
+              <a14:hiddenFill xmlns="" xmlns:a14="http://schemas.microsoft.com/office/drawing/2010/main">
                 <a:solidFill>
                   <a:schemeClr val="bg1"/>
                 </a:solidFill>
               </a14:hiddenFill>
             </a:ext>
             <a:ext uri="{91240B29-F687-4f45-9708-019B960494DF}">
-              <a14:hiddenLine xmlns:a14="http://schemas.microsoft.com/office/drawing/2010/main" xmlns="" w="12700">
+              <a14:hiddenLine xmlns="" xmlns:a14="http://schemas.microsoft.com/office/drawing/2010/main" w="12700">
                 <a:pattFill prst="narHorz">
                   <a:fgClr>
                     <a:schemeClr val="tx1"/>
@@ -11355,7 +11384,7 @@
               </a14:hiddenLine>
             </a:ext>
             <a:ext uri="{AF507438-7753-43e0-B8FC-AC1667EBCBE1}">
-              <a14:hiddenEffects xmlns:a14="http://schemas.microsoft.com/office/drawing/2010/main" xmlns="">
+              <a14:hiddenEffects xmlns="" xmlns:a14="http://schemas.microsoft.com/office/drawing/2010/main">
                 <a:effectLst>
                   <a:outerShdw blurRad="63500" dist="38099" dir="2700000" algn="ctr" rotWithShape="0">
                     <a:schemeClr val="bg2">
@@ -12881,17 +12910,17 @@
           <a:effectLst/>
           <a:extLst>
             <a:ext uri="{FAA26D3D-D897-4be2-8F04-BA451C77F1D7}">
-              <ma14:placeholderFlag xmlns:ma14="http://schemas.microsoft.com/office/mac/drawingml/2011/main" xmlns="" val="1"/>
+              <ma14:placeholderFlag xmlns="" xmlns:ma14="http://schemas.microsoft.com/office/mac/drawingml/2011/main" val="1"/>
             </a:ext>
             <a:ext uri="{909E8E84-426E-40dd-AFC4-6F175D3DCCD1}">
-              <a14:hiddenFill xmlns:a14="http://schemas.microsoft.com/office/drawing/2010/main" xmlns="">
+              <a14:hiddenFill xmlns="" xmlns:a14="http://schemas.microsoft.com/office/drawing/2010/main">
                 <a:solidFill>
                   <a:schemeClr val="bg1"/>
                 </a:solidFill>
               </a14:hiddenFill>
             </a:ext>
             <a:ext uri="{91240B29-F687-4f45-9708-019B960494DF}">
-              <a14:hiddenLine xmlns:a14="http://schemas.microsoft.com/office/drawing/2010/main" xmlns="" w="12700">
+              <a14:hiddenLine xmlns="" xmlns:a14="http://schemas.microsoft.com/office/drawing/2010/main" w="12700">
                 <a:pattFill prst="narHorz">
                   <a:fgClr>
                     <a:schemeClr val="tx1"/>
@@ -12906,7 +12935,7 @@
               </a14:hiddenLine>
             </a:ext>
             <a:ext uri="{AF507438-7753-43e0-B8FC-AC1667EBCBE1}">
-              <a14:hiddenEffects xmlns:a14="http://schemas.microsoft.com/office/drawing/2010/main" xmlns="">
+              <a14:hiddenEffects xmlns="" xmlns:a14="http://schemas.microsoft.com/office/drawing/2010/main">
                 <a:effectLst>
                   <a:outerShdw blurRad="63500" dist="38099" dir="2700000" algn="ctr" rotWithShape="0">
                     <a:schemeClr val="bg2">
@@ -13523,17 +13552,17 @@
           <a:effectLst/>
           <a:extLst>
             <a:ext uri="{FAA26D3D-D897-4be2-8F04-BA451C77F1D7}">
-              <ma14:placeholderFlag xmlns:ma14="http://schemas.microsoft.com/office/mac/drawingml/2011/main" xmlns="" val="1"/>
+              <ma14:placeholderFlag xmlns="" xmlns:ma14="http://schemas.microsoft.com/office/mac/drawingml/2011/main" val="1"/>
             </a:ext>
             <a:ext uri="{909E8E84-426E-40dd-AFC4-6F175D3DCCD1}">
-              <a14:hiddenFill xmlns:a14="http://schemas.microsoft.com/office/drawing/2010/main" xmlns="">
+              <a14:hiddenFill xmlns="" xmlns:a14="http://schemas.microsoft.com/office/drawing/2010/main">
                 <a:solidFill>
                   <a:schemeClr val="bg1"/>
                 </a:solidFill>
               </a14:hiddenFill>
             </a:ext>
             <a:ext uri="{91240B29-F687-4f45-9708-019B960494DF}">
-              <a14:hiddenLine xmlns:a14="http://schemas.microsoft.com/office/drawing/2010/main" xmlns="" w="12700">
+              <a14:hiddenLine xmlns="" xmlns:a14="http://schemas.microsoft.com/office/drawing/2010/main" w="12700">
                 <a:pattFill prst="narHorz">
                   <a:fgClr>
                     <a:schemeClr val="tx1"/>
@@ -13548,7 +13577,7 @@
               </a14:hiddenLine>
             </a:ext>
             <a:ext uri="{AF507438-7753-43e0-B8FC-AC1667EBCBE1}">
-              <a14:hiddenEffects xmlns:a14="http://schemas.microsoft.com/office/drawing/2010/main" xmlns="">
+              <a14:hiddenEffects xmlns="" xmlns:a14="http://schemas.microsoft.com/office/drawing/2010/main">
                 <a:effectLst>
                   <a:outerShdw blurRad="63500" dist="38099" dir="2700000" algn="ctr" rotWithShape="0">
                     <a:schemeClr val="bg2">
@@ -18229,17 +18258,17 @@
           <a:effectLst/>
           <a:extLst>
             <a:ext uri="{FAA26D3D-D897-4be2-8F04-BA451C77F1D7}">
-              <ma14:placeholderFlag xmlns:ma14="http://schemas.microsoft.com/office/mac/drawingml/2011/main" xmlns="" val="1"/>
+              <ma14:placeholderFlag xmlns="" xmlns:ma14="http://schemas.microsoft.com/office/mac/drawingml/2011/main" val="1"/>
             </a:ext>
             <a:ext uri="{909E8E84-426E-40dd-AFC4-6F175D3DCCD1}">
-              <a14:hiddenFill xmlns:a14="http://schemas.microsoft.com/office/drawing/2010/main" xmlns="">
+              <a14:hiddenFill xmlns="" xmlns:a14="http://schemas.microsoft.com/office/drawing/2010/main">
                 <a:solidFill>
                   <a:schemeClr val="bg1"/>
                 </a:solidFill>
               </a14:hiddenFill>
             </a:ext>
             <a:ext uri="{91240B29-F687-4f45-9708-019B960494DF}">
-              <a14:hiddenLine xmlns:a14="http://schemas.microsoft.com/office/drawing/2010/main" xmlns="" w="12700">
+              <a14:hiddenLine xmlns="" xmlns:a14="http://schemas.microsoft.com/office/drawing/2010/main" w="12700">
                 <a:pattFill prst="narHorz">
                   <a:fgClr>
                     <a:schemeClr val="tx1"/>
@@ -18254,7 +18283,7 @@
               </a14:hiddenLine>
             </a:ext>
             <a:ext uri="{AF507438-7753-43e0-B8FC-AC1667EBCBE1}">
-              <a14:hiddenEffects xmlns:a14="http://schemas.microsoft.com/office/drawing/2010/main" xmlns="">
+              <a14:hiddenEffects xmlns="" xmlns:a14="http://schemas.microsoft.com/office/drawing/2010/main">
                 <a:effectLst>
                   <a:outerShdw blurRad="63500" dist="38099" dir="2700000" algn="ctr" rotWithShape="0">
                     <a:schemeClr val="bg2">
@@ -18848,17 +18877,17 @@
           <a:effectLst/>
           <a:extLst>
             <a:ext uri="{FAA26D3D-D897-4be2-8F04-BA451C77F1D7}">
-              <ma14:placeholderFlag xmlns:ma14="http://schemas.microsoft.com/office/mac/drawingml/2011/main" xmlns="" val="1"/>
+              <ma14:placeholderFlag xmlns="" xmlns:ma14="http://schemas.microsoft.com/office/mac/drawingml/2011/main" val="1"/>
             </a:ext>
             <a:ext uri="{909E8E84-426E-40dd-AFC4-6F175D3DCCD1}">
-              <a14:hiddenFill xmlns:a14="http://schemas.microsoft.com/office/drawing/2010/main" xmlns="">
+              <a14:hiddenFill xmlns="" xmlns:a14="http://schemas.microsoft.com/office/drawing/2010/main">
                 <a:solidFill>
                   <a:schemeClr val="bg1"/>
                 </a:solidFill>
               </a14:hiddenFill>
             </a:ext>
             <a:ext uri="{91240B29-F687-4f45-9708-019B960494DF}">
-              <a14:hiddenLine xmlns:a14="http://schemas.microsoft.com/office/drawing/2010/main" xmlns="" w="12700">
+              <a14:hiddenLine xmlns="" xmlns:a14="http://schemas.microsoft.com/office/drawing/2010/main" w="12700">
                 <a:pattFill prst="narHorz">
                   <a:fgClr>
                     <a:schemeClr val="tx1"/>
@@ -18873,7 +18902,7 @@
               </a14:hiddenLine>
             </a:ext>
             <a:ext uri="{AF507438-7753-43e0-B8FC-AC1667EBCBE1}">
-              <a14:hiddenEffects xmlns:a14="http://schemas.microsoft.com/office/drawing/2010/main" xmlns="">
+              <a14:hiddenEffects xmlns="" xmlns:a14="http://schemas.microsoft.com/office/drawing/2010/main">
                 <a:effectLst>
                   <a:outerShdw blurRad="63500" dist="38099" dir="2700000" algn="ctr" rotWithShape="0">
                     <a:schemeClr val="bg2">
@@ -19390,17 +19419,17 @@
           <a:effectLst/>
           <a:extLst>
             <a:ext uri="{FAA26D3D-D897-4be2-8F04-BA451C77F1D7}">
-              <ma14:placeholderFlag xmlns:ma14="http://schemas.microsoft.com/office/mac/drawingml/2011/main" xmlns="" val="1"/>
+              <ma14:placeholderFlag xmlns="" xmlns:ma14="http://schemas.microsoft.com/office/mac/drawingml/2011/main" val="1"/>
             </a:ext>
             <a:ext uri="{909E8E84-426E-40dd-AFC4-6F175D3DCCD1}">
-              <a14:hiddenFill xmlns:a14="http://schemas.microsoft.com/office/drawing/2010/main" xmlns="">
+              <a14:hiddenFill xmlns="" xmlns:a14="http://schemas.microsoft.com/office/drawing/2010/main">
                 <a:solidFill>
                   <a:schemeClr val="bg1"/>
                 </a:solidFill>
               </a14:hiddenFill>
             </a:ext>
             <a:ext uri="{91240B29-F687-4f45-9708-019B960494DF}">
-              <a14:hiddenLine xmlns:a14="http://schemas.microsoft.com/office/drawing/2010/main" xmlns="" w="12700">
+              <a14:hiddenLine xmlns="" xmlns:a14="http://schemas.microsoft.com/office/drawing/2010/main" w="12700">
                 <a:pattFill prst="narHorz">
                   <a:fgClr>
                     <a:schemeClr val="tx1"/>
@@ -19415,7 +19444,7 @@
               </a14:hiddenLine>
             </a:ext>
             <a:ext uri="{AF507438-7753-43e0-B8FC-AC1667EBCBE1}">
-              <a14:hiddenEffects xmlns:a14="http://schemas.microsoft.com/office/drawing/2010/main" xmlns="">
+              <a14:hiddenEffects xmlns="" xmlns:a14="http://schemas.microsoft.com/office/drawing/2010/main">
                 <a:effectLst>
                   <a:outerShdw blurRad="63500" dist="38099" dir="2700000" algn="ctr" rotWithShape="0">
                     <a:schemeClr val="bg2">
@@ -20686,17 +20715,17 @@
           <a:effectLst/>
           <a:extLst>
             <a:ext uri="{FAA26D3D-D897-4be2-8F04-BA451C77F1D7}">
-              <ma14:placeholderFlag xmlns:ma14="http://schemas.microsoft.com/office/mac/drawingml/2011/main" xmlns="" val="1"/>
+              <ma14:placeholderFlag xmlns="" xmlns:ma14="http://schemas.microsoft.com/office/mac/drawingml/2011/main" val="1"/>
             </a:ext>
             <a:ext uri="{909E8E84-426E-40dd-AFC4-6F175D3DCCD1}">
-              <a14:hiddenFill xmlns:a14="http://schemas.microsoft.com/office/drawing/2010/main" xmlns="">
+              <a14:hiddenFill xmlns="" xmlns:a14="http://schemas.microsoft.com/office/drawing/2010/main">
                 <a:solidFill>
                   <a:schemeClr val="bg1"/>
                 </a:solidFill>
               </a14:hiddenFill>
             </a:ext>
             <a:ext uri="{91240B29-F687-4f45-9708-019B960494DF}">
-              <a14:hiddenLine xmlns:a14="http://schemas.microsoft.com/office/drawing/2010/main" xmlns="" w="12700">
+              <a14:hiddenLine xmlns="" xmlns:a14="http://schemas.microsoft.com/office/drawing/2010/main" w="12700">
                 <a:pattFill prst="narHorz">
                   <a:fgClr>
                     <a:schemeClr val="tx1"/>
@@ -20711,7 +20740,7 @@
               </a14:hiddenLine>
             </a:ext>
             <a:ext uri="{AF507438-7753-43e0-B8FC-AC1667EBCBE1}">
-              <a14:hiddenEffects xmlns:a14="http://schemas.microsoft.com/office/drawing/2010/main" xmlns="">
+              <a14:hiddenEffects xmlns="" xmlns:a14="http://schemas.microsoft.com/office/drawing/2010/main">
                 <a:effectLst>
                   <a:outerShdw blurRad="63500" dist="38099" dir="2700000" algn="ctr" rotWithShape="0">
                     <a:schemeClr val="bg2">
@@ -20963,7 +20992,7 @@
           <a:effectLst/>
           <a:extLst>
             <a:ext uri="{AF507438-7753-43e0-B8FC-AC1667EBCBE1}">
-              <a14:hiddenEffects xmlns="" xmlns:a14="http://schemas.microsoft.com/office/drawing/2010/main">
+              <a14:hiddenEffects xmlns:a14="http://schemas.microsoft.com/office/drawing/2010/main" xmlns="">
                 <a:effectLst>
                   <a:outerShdw dist="35921" dir="2700000" algn="ctr" rotWithShape="0">
                     <a:schemeClr val="bg2"/>
@@ -21583,7 +21612,21 @@
                 <a:latin typeface="Gill Sans" panose="020B0502020104020203"/>
                 <a:ea typeface="宋体" charset="-122"/>
               </a:rPr>
-              <a:t>4 processes P1 through P5; 3 resource types R1, R2, R3 with 7, 3, 6 instances each.</a:t>
+              <a:t>5</a:t>
+            </a:r>
+            <a:r>
+              <a:rPr lang="en-GB" altLang="zh-CN" sz="2800" b="0" kern="0">
+                <a:latin typeface="Gill Sans" panose="020B0502020104020203"/>
+                <a:ea typeface="宋体" charset="-122"/>
+              </a:rPr>
+              <a:t> </a:t>
+            </a:r>
+            <a:r>
+              <a:rPr lang="en-GB" altLang="zh-CN" sz="2800" b="0" kern="0" dirty="0">
+                <a:latin typeface="Gill Sans" panose="020B0502020104020203"/>
+                <a:ea typeface="宋体" charset="-122"/>
+              </a:rPr>
+              <a:t>processes P1 through P5; 3 resource types R1, R2, R3 with 7, 3, 6 instances each.</a:t>
             </a:r>
           </a:p>
           <a:p>
@@ -24955,7 +24998,7 @@
           </a:ln>
           <a:extLst>
             <a:ext uri="{AF507438-7753-43e0-B8FC-AC1667EBCBE1}">
-              <a14:hiddenEffects xmlns="" xmlns:a14="http://schemas.microsoft.com/office/drawing/2010/main">
+              <a14:hiddenEffects xmlns:a14="http://schemas.microsoft.com/office/drawing/2010/main" xmlns="">
                 <a:effectLst>
                   <a:outerShdw dist="35921" dir="2700000" algn="ctr" rotWithShape="0">
                     <a:schemeClr val="bg2"/>
@@ -34486,7 +34529,7 @@
                   <p:embed/>
                   <p:pic>
                     <p:nvPicPr>
-                      <p:cNvPr id="2" name="Object 3">
+                      <p:cNvPr id="23" name="Object 3">
                         <a:extLst>
                           <a:ext uri="{FF2B5EF4-FFF2-40B4-BE49-F238E27FC236}">
                             <a16:creationId xmlns:a16="http://schemas.microsoft.com/office/drawing/2014/main" id="{06E861FC-D68E-CD7A-71ED-F7EE3565A007}"/>
@@ -36058,7 +36101,7 @@
         <a:effectLst/>
         <a:extLst>
           <a:ext uri="{AF507438-7753-43e0-B8FC-AC1667EBCBE1}">
-            <a14:hiddenEffects xmlns:a14="http://schemas.microsoft.com/office/drawing/2010/main" xmlns="">
+            <a14:hiddenEffects xmlns="" xmlns:a14="http://schemas.microsoft.com/office/drawing/2010/main">
               <a:effectLst>
                 <a:outerShdw dist="35921" dir="2700000" algn="ctr" rotWithShape="0">
                   <a:schemeClr val="bg2"/>
@@ -36131,7 +36174,7 @@
         <a:effectLst/>
         <a:extLst>
           <a:ext uri="{AF507438-7753-43e0-B8FC-AC1667EBCBE1}">
-            <a14:hiddenEffects xmlns:a14="http://schemas.microsoft.com/office/drawing/2010/main" xmlns="">
+            <a14:hiddenEffects xmlns="" xmlns:a14="http://schemas.microsoft.com/office/drawing/2010/main">
               <a:effectLst>
                 <a:outerShdw dist="35921" dir="2700000" algn="ctr" rotWithShape="0">
                   <a:schemeClr val="bg2"/>

--- a/PPTs/L4-Exercises ANS.pptx
+++ b/PPTs/L4-Exercises ANS.pptx
@@ -181,12 +181,20 @@
 </p:presentation>
 </file>
 
+<file path=ppt/revisionInfo.xml><?xml version="1.0" encoding="utf-8"?>
+<p1510:revInfo xmlns:a="http://schemas.openxmlformats.org/drawingml/2006/main" xmlns:r="http://schemas.openxmlformats.org/officeDocument/2006/relationships" xmlns:p1510="http://schemas.microsoft.com/office/powerpoint/2015/10/main">
+  <p1510:revLst>
+    <p1510:client id="{D5F134B6-D37D-4D2B-9A35-B8F225AC66B4}" v="3" dt="2025-10-17T01:22:21.469"/>
+  </p1510:revLst>
+</p1510:revInfo>
+</file>
+
 <file path=ppt/changesInfos/changesInfo1.xml><?xml version="1.0" encoding="utf-8"?>
 <pc:chgInfo xmlns:a="http://schemas.openxmlformats.org/drawingml/2006/main" xmlns:r="http://schemas.openxmlformats.org/officeDocument/2006/relationships" xmlns:ac="http://schemas.microsoft.com/office/drawing/2013/main/command" xmlns:pc="http://schemas.microsoft.com/office/powerpoint/2013/main/command">
   <pc:docChgLst>
     <pc:chgData name="Zonghua Gu" userId="9a7e1853e1951ef5" providerId="LiveId" clId="{CF1FAA12-072C-4ED5-BA76-0FFFAEFDB88A}"/>
-    <pc:docChg chg="modSld">
-      <pc:chgData name="Zonghua Gu" userId="9a7e1853e1951ef5" providerId="LiveId" clId="{CF1FAA12-072C-4ED5-BA76-0FFFAEFDB88A}" dt="2025-09-26T00:33:07.077" v="1" actId="20577"/>
+    <pc:docChg chg="custSel modSld">
+      <pc:chgData name="Zonghua Gu" userId="9a7e1853e1951ef5" providerId="LiveId" clId="{CF1FAA12-072C-4ED5-BA76-0FFFAEFDB88A}" dt="2025-10-17T01:22:23.049" v="46" actId="20577"/>
       <pc:docMkLst>
         <pc:docMk/>
       </pc:docMkLst>
@@ -202,6 +210,66 @@
             <pc:docMk/>
             <pc:sldMk cId="3198402123" sldId="381"/>
             <ac:spMk id="22" creationId="{E6AF71B3-F5D1-B2DE-B835-5C8208F44553}"/>
+          </ac:spMkLst>
+        </pc:spChg>
+      </pc:sldChg>
+      <pc:sldChg chg="modSp mod">
+        <pc:chgData name="Zonghua Gu" userId="9a7e1853e1951ef5" providerId="LiveId" clId="{CF1FAA12-072C-4ED5-BA76-0FFFAEFDB88A}" dt="2025-10-17T01:20:09.875" v="29" actId="20577"/>
+        <pc:sldMkLst>
+          <pc:docMk/>
+          <pc:sldMk cId="3823801097" sldId="420"/>
+        </pc:sldMkLst>
+        <pc:spChg chg="mod">
+          <ac:chgData name="Zonghua Gu" userId="9a7e1853e1951ef5" providerId="LiveId" clId="{CF1FAA12-072C-4ED5-BA76-0FFFAEFDB88A}" dt="2025-10-17T01:20:09.875" v="29" actId="20577"/>
+          <ac:spMkLst>
+            <pc:docMk/>
+            <pc:sldMk cId="3823801097" sldId="420"/>
+            <ac:spMk id="7" creationId="{8BDE5981-C58E-1D2C-A988-FFF28496CD9B}"/>
+          </ac:spMkLst>
+        </pc:spChg>
+      </pc:sldChg>
+      <pc:sldChg chg="modSp mod">
+        <pc:chgData name="Zonghua Gu" userId="9a7e1853e1951ef5" providerId="LiveId" clId="{CF1FAA12-072C-4ED5-BA76-0FFFAEFDB88A}" dt="2025-10-17T01:21:42.124" v="41" actId="20577"/>
+        <pc:sldMkLst>
+          <pc:docMk/>
+          <pc:sldMk cId="937329881" sldId="1384"/>
+        </pc:sldMkLst>
+        <pc:spChg chg="mod">
+          <ac:chgData name="Zonghua Gu" userId="9a7e1853e1951ef5" providerId="LiveId" clId="{CF1FAA12-072C-4ED5-BA76-0FFFAEFDB88A}" dt="2025-10-17T01:21:42.124" v="41" actId="20577"/>
+          <ac:spMkLst>
+            <pc:docMk/>
+            <pc:sldMk cId="937329881" sldId="1384"/>
+            <ac:spMk id="3" creationId="{C96CE106-EFF2-89A6-A94C-94BA0CA70C60}"/>
+          </ac:spMkLst>
+        </pc:spChg>
+      </pc:sldChg>
+      <pc:sldChg chg="modSp mod">
+        <pc:chgData name="Zonghua Gu" userId="9a7e1853e1951ef5" providerId="LiveId" clId="{CF1FAA12-072C-4ED5-BA76-0FFFAEFDB88A}" dt="2025-10-17T01:22:04.667" v="43" actId="20577"/>
+        <pc:sldMkLst>
+          <pc:docMk/>
+          <pc:sldMk cId="210011671" sldId="1386"/>
+        </pc:sldMkLst>
+        <pc:spChg chg="mod">
+          <ac:chgData name="Zonghua Gu" userId="9a7e1853e1951ef5" providerId="LiveId" clId="{CF1FAA12-072C-4ED5-BA76-0FFFAEFDB88A}" dt="2025-10-17T01:22:04.667" v="43" actId="20577"/>
+          <ac:spMkLst>
+            <pc:docMk/>
+            <pc:sldMk cId="210011671" sldId="1386"/>
+            <ac:spMk id="3" creationId="{2C890D62-C0BE-DA6D-366C-8F725FB1BCE9}"/>
+          </ac:spMkLst>
+        </pc:spChg>
+      </pc:sldChg>
+      <pc:sldChg chg="modSp mod">
+        <pc:chgData name="Zonghua Gu" userId="9a7e1853e1951ef5" providerId="LiveId" clId="{CF1FAA12-072C-4ED5-BA76-0FFFAEFDB88A}" dt="2025-10-17T01:22:23.049" v="46" actId="20577"/>
+        <pc:sldMkLst>
+          <pc:docMk/>
+          <pc:sldMk cId="2996913365" sldId="1388"/>
+        </pc:sldMkLst>
+        <pc:spChg chg="mod">
+          <ac:chgData name="Zonghua Gu" userId="9a7e1853e1951ef5" providerId="LiveId" clId="{CF1FAA12-072C-4ED5-BA76-0FFFAEFDB88A}" dt="2025-10-17T01:22:23.049" v="46" actId="20577"/>
+          <ac:spMkLst>
+            <pc:docMk/>
+            <pc:sldMk cId="2996913365" sldId="1388"/>
+            <ac:spMk id="3" creationId="{E9304C07-65AC-81BF-04CE-B8BAC4C0342A}"/>
           </ac:spMkLst>
         </pc:spChg>
       </pc:sldChg>
@@ -258,14 +326,14 @@
           <a:effectLst/>
           <a:extLst>
             <a:ext uri="{909E8E84-426E-40dd-AFC4-6F175D3DCCD1}">
-              <a14:hiddenFill xmlns="" xmlns:a14="http://schemas.microsoft.com/office/drawing/2010/main">
+              <a14:hiddenFill xmlns:a14="http://schemas.microsoft.com/office/drawing/2010/main" xmlns="">
                 <a:solidFill>
                   <a:schemeClr val="bg1"/>
                 </a:solidFill>
               </a14:hiddenFill>
             </a:ext>
             <a:ext uri="{91240B29-F687-4f45-9708-019B960494DF}">
-              <a14:hiddenLine xmlns="" xmlns:a14="http://schemas.microsoft.com/office/drawing/2010/main" w="12700">
+              <a14:hiddenLine xmlns:a14="http://schemas.microsoft.com/office/drawing/2010/main" xmlns="" w="12700">
                 <a:pattFill prst="narHorz">
                   <a:fgClr>
                     <a:schemeClr val="tx1"/>
@@ -280,7 +348,7 @@
               </a14:hiddenLine>
             </a:ext>
             <a:ext uri="{AF507438-7753-43e0-B8FC-AC1667EBCBE1}">
-              <a14:hiddenEffects xmlns="" xmlns:a14="http://schemas.microsoft.com/office/drawing/2010/main">
+              <a14:hiddenEffects xmlns:a14="http://schemas.microsoft.com/office/drawing/2010/main" xmlns="">
                 <a:effectLst>
                   <a:outerShdw dist="35921" dir="2700000" algn="ctr" rotWithShape="0">
                     <a:schemeClr val="bg2"/>
@@ -386,14 +454,14 @@
           <a:effectLst/>
           <a:extLst>
             <a:ext uri="{909E8E84-426E-40dd-AFC4-6F175D3DCCD1}">
-              <a14:hiddenFill xmlns="" xmlns:a14="http://schemas.microsoft.com/office/drawing/2010/main">
+              <a14:hiddenFill xmlns:a14="http://schemas.microsoft.com/office/drawing/2010/main" xmlns="">
                 <a:solidFill>
                   <a:schemeClr val="bg1"/>
                 </a:solidFill>
               </a14:hiddenFill>
             </a:ext>
             <a:ext uri="{91240B29-F687-4f45-9708-019B960494DF}">
-              <a14:hiddenLine xmlns="" xmlns:a14="http://schemas.microsoft.com/office/drawing/2010/main" w="12700">
+              <a14:hiddenLine xmlns:a14="http://schemas.microsoft.com/office/drawing/2010/main" xmlns="" w="12700">
                 <a:pattFill prst="narHorz">
                   <a:fgClr>
                     <a:schemeClr val="tx1"/>
@@ -408,7 +476,7 @@
               </a14:hiddenLine>
             </a:ext>
             <a:ext uri="{AF507438-7753-43e0-B8FC-AC1667EBCBE1}">
-              <a14:hiddenEffects xmlns="" xmlns:a14="http://schemas.microsoft.com/office/drawing/2010/main">
+              <a14:hiddenEffects xmlns:a14="http://schemas.microsoft.com/office/drawing/2010/main" xmlns="">
                 <a:effectLst>
                   <a:outerShdw dist="35921" dir="2700000" algn="ctr" rotWithShape="0">
                     <a:schemeClr val="bg2"/>
@@ -476,17 +544,17 @@
           <a:effectLst/>
           <a:extLst>
             <a:ext uri="{FAA26D3D-D897-4be2-8F04-BA451C77F1D7}">
-              <ma14:placeholderFlag xmlns="" xmlns:ma14="http://schemas.microsoft.com/office/mac/drawingml/2011/main" val="1"/>
+              <ma14:placeholderFlag xmlns:ma14="http://schemas.microsoft.com/office/mac/drawingml/2011/main" xmlns="" val="1"/>
             </a:ext>
             <a:ext uri="{909E8E84-426E-40dd-AFC4-6F175D3DCCD1}">
-              <a14:hiddenFill xmlns="" xmlns:a14="http://schemas.microsoft.com/office/drawing/2010/main">
+              <a14:hiddenFill xmlns:a14="http://schemas.microsoft.com/office/drawing/2010/main" xmlns="">
                 <a:solidFill>
                   <a:srgbClr val="FFFFFF"/>
                 </a:solidFill>
               </a14:hiddenFill>
             </a:ext>
             <a:ext uri="{AF507438-7753-43e0-B8FC-AC1667EBCBE1}">
-              <a14:hiddenEffects xmlns="" xmlns:a14="http://schemas.microsoft.com/office/drawing/2010/main">
+              <a14:hiddenEffects xmlns:a14="http://schemas.microsoft.com/office/drawing/2010/main" xmlns="">
                 <a:effectLst>
                   <a:outerShdw blurRad="63500" dist="38099" dir="2700000" algn="ctr" rotWithShape="0">
                     <a:srgbClr val="000000">
@@ -497,7 +565,7 @@
               </a14:hiddenEffects>
             </a:ext>
             <a:ext uri="{53640926-AAD7-44d8-BBD7-CCE9431645EC}">
-              <a14:shadowObscured xmlns="" xmlns:a14="http://schemas.microsoft.com/office/drawing/2010/main" val="1"/>
+              <a14:shadowObscured xmlns:a14="http://schemas.microsoft.com/office/drawing/2010/main" xmlns="" val="1"/>
             </a:ext>
           </a:extLst>
         </p:spPr>
@@ -527,14 +595,14 @@
           <a:effectLst/>
           <a:extLst>
             <a:ext uri="{909E8E84-426E-40dd-AFC4-6F175D3DCCD1}">
-              <a14:hiddenFill xmlns="" xmlns:a14="http://schemas.microsoft.com/office/drawing/2010/main">
+              <a14:hiddenFill xmlns:a14="http://schemas.microsoft.com/office/drawing/2010/main" xmlns="">
                 <a:solidFill>
                   <a:schemeClr val="bg1"/>
                 </a:solidFill>
               </a14:hiddenFill>
             </a:ext>
             <a:ext uri="{91240B29-F687-4f45-9708-019B960494DF}">
-              <a14:hiddenLine xmlns="" xmlns:a14="http://schemas.microsoft.com/office/drawing/2010/main" w="12700">
+              <a14:hiddenLine xmlns:a14="http://schemas.microsoft.com/office/drawing/2010/main" xmlns="" w="12700">
                 <a:pattFill prst="narHorz">
                   <a:fgClr>
                     <a:schemeClr val="tx1"/>
@@ -549,7 +617,7 @@
               </a14:hiddenLine>
             </a:ext>
             <a:ext uri="{AF507438-7753-43e0-B8FC-AC1667EBCBE1}">
-              <a14:hiddenEffects xmlns="" xmlns:a14="http://schemas.microsoft.com/office/drawing/2010/main">
+              <a14:hiddenEffects xmlns:a14="http://schemas.microsoft.com/office/drawing/2010/main" xmlns="">
                 <a:effectLst>
                   <a:outerShdw dist="35921" dir="2700000" algn="ctr" rotWithShape="0">
                     <a:schemeClr val="bg2"/>
@@ -799,10 +867,10 @@
         <p:spPr>
           <a:extLst>
             <a:ext uri="{FAA26D3D-D897-4be2-8F04-BA451C77F1D7}">
-              <ma14:placeholderFlag xmlns="" xmlns:ma14="http://schemas.microsoft.com/office/mac/drawingml/2011/main" val="1"/>
+              <ma14:placeholderFlag xmlns:ma14="http://schemas.microsoft.com/office/mac/drawingml/2011/main" xmlns="" val="1"/>
             </a:ext>
             <a:ext uri="{AF507438-7753-43e0-B8FC-AC1667EBCBE1}">
-              <a14:hiddenEffects xmlns="" xmlns:a14="http://schemas.microsoft.com/office/drawing/2010/main">
+              <a14:hiddenEffects xmlns:a14="http://schemas.microsoft.com/office/drawing/2010/main" xmlns="">
                 <a:effectLst>
                   <a:outerShdw blurRad="63500" dist="38099" dir="2700000" algn="ctr" rotWithShape="0">
                     <a:schemeClr val="bg2">
@@ -3747,17 +3815,17 @@
           <a:effectLst/>
           <a:extLst>
             <a:ext uri="{FAA26D3D-D897-4be2-8F04-BA451C77F1D7}">
-              <ma14:placeholderFlag xmlns="" xmlns:ma14="http://schemas.microsoft.com/office/mac/drawingml/2011/main" val="1"/>
+              <ma14:placeholderFlag xmlns:ma14="http://schemas.microsoft.com/office/mac/drawingml/2011/main" xmlns="" val="1"/>
             </a:ext>
             <a:ext uri="{909E8E84-426E-40dd-AFC4-6F175D3DCCD1}">
-              <a14:hiddenFill xmlns="" xmlns:a14="http://schemas.microsoft.com/office/drawing/2010/main">
+              <a14:hiddenFill xmlns:a14="http://schemas.microsoft.com/office/drawing/2010/main" xmlns="">
                 <a:solidFill>
                   <a:schemeClr val="bg1"/>
                 </a:solidFill>
               </a14:hiddenFill>
             </a:ext>
             <a:ext uri="{91240B29-F687-4f45-9708-019B960494DF}">
-              <a14:hiddenLine xmlns="" xmlns:a14="http://schemas.microsoft.com/office/drawing/2010/main" w="12700">
+              <a14:hiddenLine xmlns:a14="http://schemas.microsoft.com/office/drawing/2010/main" xmlns="" w="12700">
                 <a:pattFill prst="narHorz">
                   <a:fgClr>
                     <a:schemeClr val="tx1"/>
@@ -3772,7 +3840,7 @@
               </a14:hiddenLine>
             </a:ext>
             <a:ext uri="{AF507438-7753-43e0-B8FC-AC1667EBCBE1}">
-              <a14:hiddenEffects xmlns="" xmlns:a14="http://schemas.microsoft.com/office/drawing/2010/main">
+              <a14:hiddenEffects xmlns:a14="http://schemas.microsoft.com/office/drawing/2010/main" xmlns="">
                 <a:effectLst>
                   <a:outerShdw blurRad="63500" dist="38099" dir="2700000" algn="ctr" rotWithShape="0">
                     <a:schemeClr val="bg2">
@@ -3825,17 +3893,17 @@
           <a:effectLst/>
           <a:extLst>
             <a:ext uri="{FAA26D3D-D897-4be2-8F04-BA451C77F1D7}">
-              <ma14:placeholderFlag xmlns="" xmlns:ma14="http://schemas.microsoft.com/office/mac/drawingml/2011/main" val="1"/>
+              <ma14:placeholderFlag xmlns:ma14="http://schemas.microsoft.com/office/mac/drawingml/2011/main" xmlns="" val="1"/>
             </a:ext>
             <a:ext uri="{909E8E84-426E-40dd-AFC4-6F175D3DCCD1}">
-              <a14:hiddenFill xmlns="" xmlns:a14="http://schemas.microsoft.com/office/drawing/2010/main">
+              <a14:hiddenFill xmlns:a14="http://schemas.microsoft.com/office/drawing/2010/main" xmlns="">
                 <a:solidFill>
                   <a:schemeClr val="bg1"/>
                 </a:solidFill>
               </a14:hiddenFill>
             </a:ext>
             <a:ext uri="{91240B29-F687-4f45-9708-019B960494DF}">
-              <a14:hiddenLine xmlns="" xmlns:a14="http://schemas.microsoft.com/office/drawing/2010/main" w="12700">
+              <a14:hiddenLine xmlns:a14="http://schemas.microsoft.com/office/drawing/2010/main" xmlns="" w="12700">
                 <a:pattFill prst="narHorz">
                   <a:fgClr>
                     <a:schemeClr val="tx1"/>
@@ -3850,7 +3918,7 @@
               </a14:hiddenLine>
             </a:ext>
             <a:ext uri="{AF507438-7753-43e0-B8FC-AC1667EBCBE1}">
-              <a14:hiddenEffects xmlns="" xmlns:a14="http://schemas.microsoft.com/office/drawing/2010/main">
+              <a14:hiddenEffects xmlns:a14="http://schemas.microsoft.com/office/drawing/2010/main" xmlns="">
                 <a:effectLst>
                   <a:outerShdw blurRad="63500" dist="38099" dir="2700000" algn="ctr" rotWithShape="0">
                     <a:schemeClr val="bg2">
@@ -3934,12 +4002,12 @@
           <a:effectLst/>
           <a:extLst>
             <a:ext uri="{909E8E84-426E-40dd-AFC4-6F175D3DCCD1}">
-              <a14:hiddenFill xmlns="" xmlns:a14="http://schemas.microsoft.com/office/drawing/2010/main">
+              <a14:hiddenFill xmlns:a14="http://schemas.microsoft.com/office/drawing/2010/main" xmlns="">
                 <a:noFill/>
               </a14:hiddenFill>
             </a:ext>
             <a:ext uri="{AF507438-7753-43e0-B8FC-AC1667EBCBE1}">
-              <a14:hiddenEffects xmlns="" xmlns:a14="http://schemas.microsoft.com/office/drawing/2010/main">
+              <a14:hiddenEffects xmlns:a14="http://schemas.microsoft.com/office/drawing/2010/main" xmlns="">
                 <a:effectLst>
                   <a:outerShdw blurRad="63500" dist="38099" dir="2700000" algn="ctr" rotWithShape="0">
                     <a:schemeClr val="bg2">
@@ -7998,7 +8066,7 @@
           <a:effectLst/>
           <a:extLst>
             <a:ext uri="{AF507438-7753-43e0-B8FC-AC1667EBCBE1}">
-              <a14:hiddenEffects xmlns:a14="http://schemas.microsoft.com/office/drawing/2010/main" xmlns="">
+              <a14:hiddenEffects xmlns="" xmlns:a14="http://schemas.microsoft.com/office/drawing/2010/main">
                 <a:effectLst>
                   <a:outerShdw dist="35921" dir="2700000" algn="ctr" rotWithShape="0">
                     <a:schemeClr val="bg2"/>
@@ -8304,7 +8372,7 @@
           <a:effectLst/>
           <a:extLst>
             <a:ext uri="{AF507438-7753-43e0-B8FC-AC1667EBCBE1}">
-              <a14:hiddenEffects xmlns:a14="http://schemas.microsoft.com/office/drawing/2010/main" xmlns="">
+              <a14:hiddenEffects xmlns="" xmlns:a14="http://schemas.microsoft.com/office/drawing/2010/main">
                 <a:effectLst>
                   <a:outerShdw dist="35921" dir="2700000" algn="ctr" rotWithShape="0">
                     <a:schemeClr val="bg2"/>
@@ -8425,13 +8493,13 @@
         </p:spPr>
         <p:txBody>
           <a:bodyPr>
-            <a:normAutofit lnSpcReduction="10000"/>
+            <a:normAutofit fontScale="92500" lnSpcReduction="10000"/>
           </a:bodyPr>
           <a:lstStyle/>
           <a:p>
             <a:r>
               <a:rPr lang="en-GB" dirty="0"/>
-              <a:t>If each lawyer has 2 arms, and there is a pile of 5 chopsticks at the </a:t>
+              <a:t>There are 5 lawyers, each lawyer has 2 arms, and there is a pile of 5 chopsticks at the </a:t>
             </a:r>
             <a:r>
               <a:rPr lang="en-GB" dirty="0" err="1"/>
@@ -8639,17 +8707,17 @@
           <a:effectLst/>
           <a:extLst>
             <a:ext uri="{FAA26D3D-D897-4be2-8F04-BA451C77F1D7}">
-              <ma14:placeholderFlag xmlns="" xmlns:ma14="http://schemas.microsoft.com/office/mac/drawingml/2011/main" val="1"/>
+              <ma14:placeholderFlag xmlns:ma14="http://schemas.microsoft.com/office/mac/drawingml/2011/main" xmlns="" val="1"/>
             </a:ext>
             <a:ext uri="{909E8E84-426E-40dd-AFC4-6F175D3DCCD1}">
-              <a14:hiddenFill xmlns="" xmlns:a14="http://schemas.microsoft.com/office/drawing/2010/main">
+              <a14:hiddenFill xmlns:a14="http://schemas.microsoft.com/office/drawing/2010/main" xmlns="">
                 <a:solidFill>
                   <a:schemeClr val="bg1"/>
                 </a:solidFill>
               </a14:hiddenFill>
             </a:ext>
             <a:ext uri="{91240B29-F687-4f45-9708-019B960494DF}">
-              <a14:hiddenLine xmlns="" xmlns:a14="http://schemas.microsoft.com/office/drawing/2010/main" w="12700">
+              <a14:hiddenLine xmlns:a14="http://schemas.microsoft.com/office/drawing/2010/main" xmlns="" w="12700">
                 <a:pattFill prst="narHorz">
                   <a:fgClr>
                     <a:schemeClr val="tx1"/>
@@ -8664,7 +8732,7 @@
               </a14:hiddenLine>
             </a:ext>
             <a:ext uri="{AF507438-7753-43e0-B8FC-AC1667EBCBE1}">
-              <a14:hiddenEffects xmlns="" xmlns:a14="http://schemas.microsoft.com/office/drawing/2010/main">
+              <a14:hiddenEffects xmlns:a14="http://schemas.microsoft.com/office/drawing/2010/main" xmlns="">
                 <a:effectLst>
                   <a:outerShdw blurRad="63500" dist="38099" dir="2700000" algn="ctr" rotWithShape="0">
                     <a:schemeClr val="bg2">
@@ -10154,17 +10222,17 @@
           <a:effectLst/>
           <a:extLst>
             <a:ext uri="{FAA26D3D-D897-4be2-8F04-BA451C77F1D7}">
-              <ma14:placeholderFlag xmlns="" xmlns:ma14="http://schemas.microsoft.com/office/mac/drawingml/2011/main" val="1"/>
+              <ma14:placeholderFlag xmlns:ma14="http://schemas.microsoft.com/office/mac/drawingml/2011/main" xmlns="" val="1"/>
             </a:ext>
             <a:ext uri="{909E8E84-426E-40dd-AFC4-6F175D3DCCD1}">
-              <a14:hiddenFill xmlns="" xmlns:a14="http://schemas.microsoft.com/office/drawing/2010/main">
+              <a14:hiddenFill xmlns:a14="http://schemas.microsoft.com/office/drawing/2010/main" xmlns="">
                 <a:solidFill>
                   <a:schemeClr val="bg1"/>
                 </a:solidFill>
               </a14:hiddenFill>
             </a:ext>
             <a:ext uri="{91240B29-F687-4f45-9708-019B960494DF}">
-              <a14:hiddenLine xmlns="" xmlns:a14="http://schemas.microsoft.com/office/drawing/2010/main" w="12700">
+              <a14:hiddenLine xmlns:a14="http://schemas.microsoft.com/office/drawing/2010/main" xmlns="" w="12700">
                 <a:pattFill prst="narHorz">
                   <a:fgClr>
                     <a:schemeClr val="tx1"/>
@@ -10179,7 +10247,7 @@
               </a14:hiddenLine>
             </a:ext>
             <a:ext uri="{AF507438-7753-43e0-B8FC-AC1667EBCBE1}">
-              <a14:hiddenEffects xmlns="" xmlns:a14="http://schemas.microsoft.com/office/drawing/2010/main">
+              <a14:hiddenEffects xmlns:a14="http://schemas.microsoft.com/office/drawing/2010/main" xmlns="">
                 <a:effectLst>
                   <a:outerShdw blurRad="63500" dist="38099" dir="2700000" algn="ctr" rotWithShape="0">
                     <a:schemeClr val="bg2">
@@ -10973,17 +11041,17 @@
           <a:effectLst/>
           <a:extLst>
             <a:ext uri="{FAA26D3D-D897-4be2-8F04-BA451C77F1D7}">
-              <ma14:placeholderFlag xmlns="" xmlns:ma14="http://schemas.microsoft.com/office/mac/drawingml/2011/main" val="1"/>
+              <ma14:placeholderFlag xmlns:ma14="http://schemas.microsoft.com/office/mac/drawingml/2011/main" xmlns="" val="1"/>
             </a:ext>
             <a:ext uri="{909E8E84-426E-40dd-AFC4-6F175D3DCCD1}">
-              <a14:hiddenFill xmlns="" xmlns:a14="http://schemas.microsoft.com/office/drawing/2010/main">
+              <a14:hiddenFill xmlns:a14="http://schemas.microsoft.com/office/drawing/2010/main" xmlns="">
                 <a:solidFill>
                   <a:schemeClr val="bg1"/>
                 </a:solidFill>
               </a14:hiddenFill>
             </a:ext>
             <a:ext uri="{91240B29-F687-4f45-9708-019B960494DF}">
-              <a14:hiddenLine xmlns="" xmlns:a14="http://schemas.microsoft.com/office/drawing/2010/main" w="12700">
+              <a14:hiddenLine xmlns:a14="http://schemas.microsoft.com/office/drawing/2010/main" xmlns="" w="12700">
                 <a:pattFill prst="narHorz">
                   <a:fgClr>
                     <a:schemeClr val="tx1"/>
@@ -10998,7 +11066,7 @@
               </a14:hiddenLine>
             </a:ext>
             <a:ext uri="{AF507438-7753-43e0-B8FC-AC1667EBCBE1}">
-              <a14:hiddenEffects xmlns="" xmlns:a14="http://schemas.microsoft.com/office/drawing/2010/main">
+              <a14:hiddenEffects xmlns:a14="http://schemas.microsoft.com/office/drawing/2010/main" xmlns="">
                 <a:effectLst>
                   <a:outerShdw blurRad="63500" dist="38099" dir="2700000" algn="ctr" rotWithShape="0">
                     <a:schemeClr val="bg2">
@@ -11359,17 +11427,17 @@
           <a:effectLst/>
           <a:extLst>
             <a:ext uri="{FAA26D3D-D897-4be2-8F04-BA451C77F1D7}">
-              <ma14:placeholderFlag xmlns="" xmlns:ma14="http://schemas.microsoft.com/office/mac/drawingml/2011/main" val="1"/>
+              <ma14:placeholderFlag xmlns:ma14="http://schemas.microsoft.com/office/mac/drawingml/2011/main" xmlns="" val="1"/>
             </a:ext>
             <a:ext uri="{909E8E84-426E-40dd-AFC4-6F175D3DCCD1}">
-              <a14:hiddenFill xmlns="" xmlns:a14="http://schemas.microsoft.com/office/drawing/2010/main">
+              <a14:hiddenFill xmlns:a14="http://schemas.microsoft.com/office/drawing/2010/main" xmlns="">
                 <a:solidFill>
                   <a:schemeClr val="bg1"/>
                 </a:solidFill>
               </a14:hiddenFill>
             </a:ext>
             <a:ext uri="{91240B29-F687-4f45-9708-019B960494DF}">
-              <a14:hiddenLine xmlns="" xmlns:a14="http://schemas.microsoft.com/office/drawing/2010/main" w="12700">
+              <a14:hiddenLine xmlns:a14="http://schemas.microsoft.com/office/drawing/2010/main" xmlns="" w="12700">
                 <a:pattFill prst="narHorz">
                   <a:fgClr>
                     <a:schemeClr val="tx1"/>
@@ -11384,7 +11452,7 @@
               </a14:hiddenLine>
             </a:ext>
             <a:ext uri="{AF507438-7753-43e0-B8FC-AC1667EBCBE1}">
-              <a14:hiddenEffects xmlns="" xmlns:a14="http://schemas.microsoft.com/office/drawing/2010/main">
+              <a14:hiddenEffects xmlns:a14="http://schemas.microsoft.com/office/drawing/2010/main" xmlns="">
                 <a:effectLst>
                   <a:outerShdw blurRad="63500" dist="38099" dir="2700000" algn="ctr" rotWithShape="0">
                     <a:schemeClr val="bg2">
@@ -12910,17 +12978,17 @@
           <a:effectLst/>
           <a:extLst>
             <a:ext uri="{FAA26D3D-D897-4be2-8F04-BA451C77F1D7}">
-              <ma14:placeholderFlag xmlns="" xmlns:ma14="http://schemas.microsoft.com/office/mac/drawingml/2011/main" val="1"/>
+              <ma14:placeholderFlag xmlns:ma14="http://schemas.microsoft.com/office/mac/drawingml/2011/main" xmlns="" val="1"/>
             </a:ext>
             <a:ext uri="{909E8E84-426E-40dd-AFC4-6F175D3DCCD1}">
-              <a14:hiddenFill xmlns="" xmlns:a14="http://schemas.microsoft.com/office/drawing/2010/main">
+              <a14:hiddenFill xmlns:a14="http://schemas.microsoft.com/office/drawing/2010/main" xmlns="">
                 <a:solidFill>
                   <a:schemeClr val="bg1"/>
                 </a:solidFill>
               </a14:hiddenFill>
             </a:ext>
             <a:ext uri="{91240B29-F687-4f45-9708-019B960494DF}">
-              <a14:hiddenLine xmlns="" xmlns:a14="http://schemas.microsoft.com/office/drawing/2010/main" w="12700">
+              <a14:hiddenLine xmlns:a14="http://schemas.microsoft.com/office/drawing/2010/main" xmlns="" w="12700">
                 <a:pattFill prst="narHorz">
                   <a:fgClr>
                     <a:schemeClr val="tx1"/>
@@ -12935,7 +13003,7 @@
               </a14:hiddenLine>
             </a:ext>
             <a:ext uri="{AF507438-7753-43e0-B8FC-AC1667EBCBE1}">
-              <a14:hiddenEffects xmlns="" xmlns:a14="http://schemas.microsoft.com/office/drawing/2010/main">
+              <a14:hiddenEffects xmlns:a14="http://schemas.microsoft.com/office/drawing/2010/main" xmlns="">
                 <a:effectLst>
                   <a:outerShdw blurRad="63500" dist="38099" dir="2700000" algn="ctr" rotWithShape="0">
                     <a:schemeClr val="bg2">
@@ -13552,17 +13620,17 @@
           <a:effectLst/>
           <a:extLst>
             <a:ext uri="{FAA26D3D-D897-4be2-8F04-BA451C77F1D7}">
-              <ma14:placeholderFlag xmlns="" xmlns:ma14="http://schemas.microsoft.com/office/mac/drawingml/2011/main" val="1"/>
+              <ma14:placeholderFlag xmlns:ma14="http://schemas.microsoft.com/office/mac/drawingml/2011/main" xmlns="" val="1"/>
             </a:ext>
             <a:ext uri="{909E8E84-426E-40dd-AFC4-6F175D3DCCD1}">
-              <a14:hiddenFill xmlns="" xmlns:a14="http://schemas.microsoft.com/office/drawing/2010/main">
+              <a14:hiddenFill xmlns:a14="http://schemas.microsoft.com/office/drawing/2010/main" xmlns="">
                 <a:solidFill>
                   <a:schemeClr val="bg1"/>
                 </a:solidFill>
               </a14:hiddenFill>
             </a:ext>
             <a:ext uri="{91240B29-F687-4f45-9708-019B960494DF}">
-              <a14:hiddenLine xmlns="" xmlns:a14="http://schemas.microsoft.com/office/drawing/2010/main" w="12700">
+              <a14:hiddenLine xmlns:a14="http://schemas.microsoft.com/office/drawing/2010/main" xmlns="" w="12700">
                 <a:pattFill prst="narHorz">
                   <a:fgClr>
                     <a:schemeClr val="tx1"/>
@@ -13577,7 +13645,7 @@
               </a14:hiddenLine>
             </a:ext>
             <a:ext uri="{AF507438-7753-43e0-B8FC-AC1667EBCBE1}">
-              <a14:hiddenEffects xmlns="" xmlns:a14="http://schemas.microsoft.com/office/drawing/2010/main">
+              <a14:hiddenEffects xmlns:a14="http://schemas.microsoft.com/office/drawing/2010/main" xmlns="">
                 <a:effectLst>
                   <a:outerShdw blurRad="63500" dist="38099" dir="2700000" algn="ctr" rotWithShape="0">
                     <a:schemeClr val="bg2">
@@ -13883,7 +13951,7 @@
           <a:p>
             <a:r>
               <a:rPr lang="en-GB" dirty="0"/>
-              <a:t>If each lawyer has 2 arms, and there is a pile of knives and forks at </a:t>
+              <a:t>There are N ≥ 2 lawyers, each lawyer has 2 arms, and there is a pile of knives and forks at </a:t>
             </a:r>
             <a:r>
               <a:rPr lang="en-GB" dirty="0" err="1"/>
@@ -14877,7 +14945,7 @@
           <a:p>
             <a:r>
               <a:rPr lang="en-GB" dirty="0"/>
-              <a:t>If each lawyer has 4 arms, and there is a pile of knives and forks at </a:t>
+              <a:t>There are N ≥ 2 lawyers, each lawyer has 4 arms, and there is a pile of knives and forks at </a:t>
             </a:r>
             <a:r>
               <a:rPr lang="en-GB" dirty="0" err="1"/>
@@ -15943,13 +16011,8 @@
             </a:r>
             <a:r>
               <a:rPr lang="en-GB" dirty="0"/>
-              <a:t> L2.</a:t>
-            </a:r>
-            <a:r>
-              <a:rPr lang="en-GB"/>
-              <a:t>wait(); no blocking</a:t>
-            </a:r>
-            <a:endParaRPr lang="en-GB" dirty="0"/>
+              <a:t> L2.wait(); no blocking</a:t>
+            </a:r>
           </a:p>
           <a:p>
             <a:r>
@@ -17177,13 +17240,21 @@
         <p:spPr/>
         <p:txBody>
           <a:bodyPr>
-            <a:normAutofit lnSpcReduction="10000"/>
+            <a:normAutofit fontScale="92500" lnSpcReduction="10000"/>
           </a:bodyPr>
           <a:lstStyle/>
           <a:p>
             <a:r>
               <a:rPr lang="en-GB" dirty="0"/>
-              <a:t>If each lawyer has 4 arms, and there is a pile of knives and forks at </a:t>
+              <a:t>There are N ≥ 2 lawyers</a:t>
+            </a:r>
+            <a:r>
+              <a:rPr lang="en-GB"/>
+              <a:t>, each </a:t>
+            </a:r>
+            <a:r>
+              <a:rPr lang="en-GB" dirty="0"/>
+              <a:t>lawyer has 4 arms, and there is a pile of knives and forks at </a:t>
             </a:r>
             <a:r>
               <a:rPr lang="en-GB" dirty="0" err="1"/>
@@ -18258,17 +18329,17 @@
           <a:effectLst/>
           <a:extLst>
             <a:ext uri="{FAA26D3D-D897-4be2-8F04-BA451C77F1D7}">
-              <ma14:placeholderFlag xmlns="" xmlns:ma14="http://schemas.microsoft.com/office/mac/drawingml/2011/main" val="1"/>
+              <ma14:placeholderFlag xmlns:ma14="http://schemas.microsoft.com/office/mac/drawingml/2011/main" xmlns="" val="1"/>
             </a:ext>
             <a:ext uri="{909E8E84-426E-40dd-AFC4-6F175D3DCCD1}">
-              <a14:hiddenFill xmlns="" xmlns:a14="http://schemas.microsoft.com/office/drawing/2010/main">
+              <a14:hiddenFill xmlns:a14="http://schemas.microsoft.com/office/drawing/2010/main" xmlns="">
                 <a:solidFill>
                   <a:schemeClr val="bg1"/>
                 </a:solidFill>
               </a14:hiddenFill>
             </a:ext>
             <a:ext uri="{91240B29-F687-4f45-9708-019B960494DF}">
-              <a14:hiddenLine xmlns="" xmlns:a14="http://schemas.microsoft.com/office/drawing/2010/main" w="12700">
+              <a14:hiddenLine xmlns:a14="http://schemas.microsoft.com/office/drawing/2010/main" xmlns="" w="12700">
                 <a:pattFill prst="narHorz">
                   <a:fgClr>
                     <a:schemeClr val="tx1"/>
@@ -18283,7 +18354,7 @@
               </a14:hiddenLine>
             </a:ext>
             <a:ext uri="{AF507438-7753-43e0-B8FC-AC1667EBCBE1}">
-              <a14:hiddenEffects xmlns="" xmlns:a14="http://schemas.microsoft.com/office/drawing/2010/main">
+              <a14:hiddenEffects xmlns:a14="http://schemas.microsoft.com/office/drawing/2010/main" xmlns="">
                 <a:effectLst>
                   <a:outerShdw blurRad="63500" dist="38099" dir="2700000" algn="ctr" rotWithShape="0">
                     <a:schemeClr val="bg2">
@@ -18877,17 +18948,17 @@
           <a:effectLst/>
           <a:extLst>
             <a:ext uri="{FAA26D3D-D897-4be2-8F04-BA451C77F1D7}">
-              <ma14:placeholderFlag xmlns="" xmlns:ma14="http://schemas.microsoft.com/office/mac/drawingml/2011/main" val="1"/>
+              <ma14:placeholderFlag xmlns:ma14="http://schemas.microsoft.com/office/mac/drawingml/2011/main" xmlns="" val="1"/>
             </a:ext>
             <a:ext uri="{909E8E84-426E-40dd-AFC4-6F175D3DCCD1}">
-              <a14:hiddenFill xmlns="" xmlns:a14="http://schemas.microsoft.com/office/drawing/2010/main">
+              <a14:hiddenFill xmlns:a14="http://schemas.microsoft.com/office/drawing/2010/main" xmlns="">
                 <a:solidFill>
                   <a:schemeClr val="bg1"/>
                 </a:solidFill>
               </a14:hiddenFill>
             </a:ext>
             <a:ext uri="{91240B29-F687-4f45-9708-019B960494DF}">
-              <a14:hiddenLine xmlns="" xmlns:a14="http://schemas.microsoft.com/office/drawing/2010/main" w="12700">
+              <a14:hiddenLine xmlns:a14="http://schemas.microsoft.com/office/drawing/2010/main" xmlns="" w="12700">
                 <a:pattFill prst="narHorz">
                   <a:fgClr>
                     <a:schemeClr val="tx1"/>
@@ -18902,7 +18973,7 @@
               </a14:hiddenLine>
             </a:ext>
             <a:ext uri="{AF507438-7753-43e0-B8FC-AC1667EBCBE1}">
-              <a14:hiddenEffects xmlns="" xmlns:a14="http://schemas.microsoft.com/office/drawing/2010/main">
+              <a14:hiddenEffects xmlns:a14="http://schemas.microsoft.com/office/drawing/2010/main" xmlns="">
                 <a:effectLst>
                   <a:outerShdw blurRad="63500" dist="38099" dir="2700000" algn="ctr" rotWithShape="0">
                     <a:schemeClr val="bg2">
@@ -19419,17 +19490,17 @@
           <a:effectLst/>
           <a:extLst>
             <a:ext uri="{FAA26D3D-D897-4be2-8F04-BA451C77F1D7}">
-              <ma14:placeholderFlag xmlns="" xmlns:ma14="http://schemas.microsoft.com/office/mac/drawingml/2011/main" val="1"/>
+              <ma14:placeholderFlag xmlns:ma14="http://schemas.microsoft.com/office/mac/drawingml/2011/main" xmlns="" val="1"/>
             </a:ext>
             <a:ext uri="{909E8E84-426E-40dd-AFC4-6F175D3DCCD1}">
-              <a14:hiddenFill xmlns="" xmlns:a14="http://schemas.microsoft.com/office/drawing/2010/main">
+              <a14:hiddenFill xmlns:a14="http://schemas.microsoft.com/office/drawing/2010/main" xmlns="">
                 <a:solidFill>
                   <a:schemeClr val="bg1"/>
                 </a:solidFill>
               </a14:hiddenFill>
             </a:ext>
             <a:ext uri="{91240B29-F687-4f45-9708-019B960494DF}">
-              <a14:hiddenLine xmlns="" xmlns:a14="http://schemas.microsoft.com/office/drawing/2010/main" w="12700">
+              <a14:hiddenLine xmlns:a14="http://schemas.microsoft.com/office/drawing/2010/main" xmlns="" w="12700">
                 <a:pattFill prst="narHorz">
                   <a:fgClr>
                     <a:schemeClr val="tx1"/>
@@ -19444,7 +19515,7 @@
               </a14:hiddenLine>
             </a:ext>
             <a:ext uri="{AF507438-7753-43e0-B8FC-AC1667EBCBE1}">
-              <a14:hiddenEffects xmlns="" xmlns:a14="http://schemas.microsoft.com/office/drawing/2010/main">
+              <a14:hiddenEffects xmlns:a14="http://schemas.microsoft.com/office/drawing/2010/main" xmlns="">
                 <a:effectLst>
                   <a:outerShdw blurRad="63500" dist="38099" dir="2700000" algn="ctr" rotWithShape="0">
                     <a:schemeClr val="bg2">
@@ -20715,17 +20786,17 @@
           <a:effectLst/>
           <a:extLst>
             <a:ext uri="{FAA26D3D-D897-4be2-8F04-BA451C77F1D7}">
-              <ma14:placeholderFlag xmlns="" xmlns:ma14="http://schemas.microsoft.com/office/mac/drawingml/2011/main" val="1"/>
+              <ma14:placeholderFlag xmlns:ma14="http://schemas.microsoft.com/office/mac/drawingml/2011/main" xmlns="" val="1"/>
             </a:ext>
             <a:ext uri="{909E8E84-426E-40dd-AFC4-6F175D3DCCD1}">
-              <a14:hiddenFill xmlns="" xmlns:a14="http://schemas.microsoft.com/office/drawing/2010/main">
+              <a14:hiddenFill xmlns:a14="http://schemas.microsoft.com/office/drawing/2010/main" xmlns="">
                 <a:solidFill>
                   <a:schemeClr val="bg1"/>
                 </a:solidFill>
               </a14:hiddenFill>
             </a:ext>
             <a:ext uri="{91240B29-F687-4f45-9708-019B960494DF}">
-              <a14:hiddenLine xmlns="" xmlns:a14="http://schemas.microsoft.com/office/drawing/2010/main" w="12700">
+              <a14:hiddenLine xmlns:a14="http://schemas.microsoft.com/office/drawing/2010/main" xmlns="" w="12700">
                 <a:pattFill prst="narHorz">
                   <a:fgClr>
                     <a:schemeClr val="tx1"/>
@@ -20740,7 +20811,7 @@
               </a14:hiddenLine>
             </a:ext>
             <a:ext uri="{AF507438-7753-43e0-B8FC-AC1667EBCBE1}">
-              <a14:hiddenEffects xmlns="" xmlns:a14="http://schemas.microsoft.com/office/drawing/2010/main">
+              <a14:hiddenEffects xmlns:a14="http://schemas.microsoft.com/office/drawing/2010/main" xmlns="">
                 <a:effectLst>
                   <a:outerShdw blurRad="63500" dist="38099" dir="2700000" algn="ctr" rotWithShape="0">
                     <a:schemeClr val="bg2">
@@ -20992,7 +21063,7 @@
           <a:effectLst/>
           <a:extLst>
             <a:ext uri="{AF507438-7753-43e0-B8FC-AC1667EBCBE1}">
-              <a14:hiddenEffects xmlns:a14="http://schemas.microsoft.com/office/drawing/2010/main" xmlns="">
+              <a14:hiddenEffects xmlns="" xmlns:a14="http://schemas.microsoft.com/office/drawing/2010/main">
                 <a:effectLst>
                   <a:outerShdw dist="35921" dir="2700000" algn="ctr" rotWithShape="0">
                     <a:schemeClr val="bg2"/>
@@ -24998,7 +25069,7 @@
           </a:ln>
           <a:extLst>
             <a:ext uri="{AF507438-7753-43e0-B8FC-AC1667EBCBE1}">
-              <a14:hiddenEffects xmlns:a14="http://schemas.microsoft.com/office/drawing/2010/main" xmlns="">
+              <a14:hiddenEffects xmlns="" xmlns:a14="http://schemas.microsoft.com/office/drawing/2010/main">
                 <a:effectLst>
                   <a:outerShdw dist="35921" dir="2700000" algn="ctr" rotWithShape="0">
                     <a:schemeClr val="bg2"/>
@@ -36101,7 +36172,7 @@
         <a:effectLst/>
         <a:extLst>
           <a:ext uri="{AF507438-7753-43e0-B8FC-AC1667EBCBE1}">
-            <a14:hiddenEffects xmlns="" xmlns:a14="http://schemas.microsoft.com/office/drawing/2010/main">
+            <a14:hiddenEffects xmlns:a14="http://schemas.microsoft.com/office/drawing/2010/main" xmlns="">
               <a:effectLst>
                 <a:outerShdw dist="35921" dir="2700000" algn="ctr" rotWithShape="0">
                   <a:schemeClr val="bg2"/>
@@ -36174,7 +36245,7 @@
         <a:effectLst/>
         <a:extLst>
           <a:ext uri="{AF507438-7753-43e0-B8FC-AC1667EBCBE1}">
-            <a14:hiddenEffects xmlns="" xmlns:a14="http://schemas.microsoft.com/office/drawing/2010/main">
+            <a14:hiddenEffects xmlns:a14="http://schemas.microsoft.com/office/drawing/2010/main" xmlns="">
               <a:effectLst>
                 <a:outerShdw dist="35921" dir="2700000" algn="ctr" rotWithShape="0">
                   <a:schemeClr val="bg2"/>
